--- a/decks/geog-economic-world/geog-economic-world_ch4_reducing-the-gap.pptx
+++ b/decks/geog-economic-world/geog-economic-world_ch4_reducing-the-gap.pptx
@@ -125,30 +125,30 @@
   <p:extLst>
     <p:ext uri="{521415D9-36F7-43E2-AB2F-B90AF26B5E84}">
       <p14:sectionLst xmlns:p14="http://schemas.microsoft.com/office/powerpoint/2010/main">
-        <p14:section name="Opening" id="{097cfc40-821b-872d-aed8-06859f21f062}">
+        <p14:section name="Opening" id="{7728652d-aa7a-f589-41cc-a9222674b09d}">
           <p14:sldIdLst>
             <p14:sldId id="256"/>
           </p14:sldIdLst>
         </p14:section>
-        <p14:section name="Gate" id="{b832f334-2edc-9602-920c-452cf9f53d72}">
+        <p14:section name="Gate" id="{870fa38a-06e9-5ad6-a6e4-d2e405bf4b56}">
           <p14:sldIdLst>
             <p14:sldId id="257"/>
             <p14:sldId id="258"/>
           </p14:sldIdLst>
         </p14:section>
-        <p14:section name="Pre-teach" id="{15941deb-d122-be05-559c-c2c5085bb489}">
+        <p14:section name="Pre-teach" id="{8632c6bc-8734-bc42-3e21-7015587eecbc}">
           <p14:sldIdLst>
             <p14:sldId id="259"/>
             <p14:sldId id="260"/>
           </p14:sldIdLst>
         </p14:section>
-        <p14:section name="Read-along" id="{cf3d0771-b2c9-054f-65d7-6a009598b154}">
+        <p14:section name="Read-along" id="{5598e9af-f4df-1f7d-8648-3a17545dd8ff}">
           <p14:sldIdLst>
             <p14:sldId id="261"/>
             <p14:sldId id="262"/>
           </p14:sldIdLst>
         </p14:section>
-        <p14:section name="Teach" id="{e47517be-a9fd-d218-56e8-431125db15eb}">
+        <p14:section name="Teach" id="{f3bf2b8c-1bf9-7634-59f4-75ee2d447b1d}">
           <p14:sldIdLst>
             <p14:sldId id="263"/>
             <p14:sldId id="264"/>
@@ -157,19 +157,19 @@
             <p14:sldId id="267"/>
           </p14:sldIdLst>
         </p14:section>
-        <p14:section name="Routes" id="{94ec5449-4314-7c2f-5fc2-f8cb9e9ea56e}">
+        <p14:section name="Routes" id="{3071851b-6e61-6c71-c4fd-7620f5f65bf8}">
           <p14:sldIdLst>
             <p14:sldId id="268"/>
             <p14:sldId id="269"/>
             <p14:sldId id="270"/>
           </p14:sldIdLst>
         </p14:section>
-        <p14:section name="Close" id="{cfb9c533-9a14-7f8a-a959-21b356606de7}">
+        <p14:section name="Close" id="{ac5d7b10-0511-652a-d4de-1c02978fe533}">
           <p14:sldIdLst>
             <p14:sldId id="271"/>
           </p14:sldIdLst>
         </p14:section>
-        <p14:section name="Answers" id="{9f225378-edd4-033f-2588-a996c4d8d06b}">
+        <p14:section name="Answers" id="{6d17cb39-e109-02fd-e11a-837de43d2cd4}">
           <p14:sldIdLst>
             <p14:sldId id="272"/>
             <p14:sldId id="273"/>
@@ -2161,8 +2161,8 @@
               <a:rPr lang="en-US" dirty="0"/>
               <a:t>Teach — Investment and industrial development. Say it in your own words, then check understanding with a quick question: ask a pupil from the pre-teach group first, since they met these words and ideas before the lesson. Pupils try to recall before you re-explain.
 Reducing the development gap needs investment in health and education. A country with more skilled and healthier workers has people who can earn more and pay more tax, and that tax can be used to develop the country further. The money for that investment has to come from somewhere, and the course lists seven sources: industrial development, tourism, aid, intermediate technology, fair trade, debt relief and microfinance loans, with investment by transnational corporations running through all of them.
-Investment is the first strategy. Transnational corporations put money and skills into low income countries by setting up businesses there. That helps develop infrastructure such as roads and power, can improve access to water and electricity, brings improvements to transport such as ports and airports, and encourages other businesses to follow. Dyson is the example. In around 2003 Dyson moved its manufacturing from Malmesbury in Wiltshire to Malaysia. Malaysia gained inward investment; workers' earnings boosted the Malaysian economy, because the more they earn the more they spend and the more tax is paid; and other companies followed Dyson and opened factories nearby, which led to roads and other services being improved. The United Kingdom gained too: Dyson's profits rose, higher corporate taxes meant more money for public services such as health and education, and new opportunities opened up for scientists working on design and research at home.
-Industrial development is the second strategy. Growing industry brings high levels of employment; with more employment comes more income and more investment; and that starts the multiplier effect. It is the pattern of the BRICS nations. Malaysia again: since 1970 it has seen a dramatic growth in its wealth and in the quality of life of its people, with a thriving manufacturing sector whose leading products include Proton cars. As manufacturing grows the workforce becomes more skilled, the products become better, and sales income rises, which pays for the next round of growth.
+Investment is the first strategy. Transnational corporations put money and skills into low income countries by setting up businesses there. That helps develop infrastructure such as roads and power, can improve access to water and electricity, brings improvements to transport such as ports and airports, and encourages other businesses to follow. Dyson is the example. In around 2003 Dyson moved its manufacturing from Malmesbury in Wiltshire to Malaysia. Malaysia gained inward investment; workers' earnings boosted the Malaysian economy, because as earnings rise, so does spending, and so does the tax collected; and other companies followed Dyson and opened factories nearby, which led to roads and other services being improved. The United Kingdom gained too: Dyson's profits rose, higher corporate taxes meant more money for public services such as health and education, and new opportunities opened up for scientists working on design and research at home.
+Industrial development is the second strategy. Growing industry brings employment on a large scale; as more people work, incomes rise and investment follows; and that starts the multiplier effect. It is the pattern of the BRICS nations. Malaysia again: since 1970 it has seen a dramatic growth in its wealth and in the quality of life of its people, with a thriving manufacturing sector whose leading products include Proton cars. As manufacturing grows the workforce becomes more skilled, the products become better, and sales income rises, which pays for the next round of growth.
 Worked example — model it step by step, thinking aloud: A factory worker is paid £9 an hour in the United Kingdom and £3 an hour in Malaysia. How much less does a company pay for one worker over a 40-hour week? (1) Find the difference in the hourly rate first: £9 − £3 = £6 an hour. (2) Multiply the difference by the number of hours: £6 × 40. (3) Work it out: 6 × 40 = 240. (4) Answer with the unit of money: the company pays £240 less a week for that worker. Answer: £240 less a week.
 Tip: When you use the Dyson example, always give a benefit for Malaysia and a benefit for the United Kingdom. A one-sided answer loses the evaluation marks.</a:t>
             </a:r>
@@ -2254,8 +2254,8 @@
               <a:rPr lang="en-US" dirty="0"/>
               <a:t>Teach — Investment and industrial development. Say it in your own words, then check understanding with a quick question: ask a pupil from the pre-teach group first, since they met these words and ideas before the lesson. Pupils try to recall before you re-explain.
 Reducing the development gap needs investment in health and education. A country with more skilled and healthier workers has people who can earn more and pay more tax, and that tax can be used to develop the country further. The money for that investment has to come from somewhere, and the course lists seven sources: industrial development, tourism, aid, intermediate technology, fair trade, debt relief and microfinance loans, with investment by transnational corporations running through all of them.
-Investment is the first strategy. Transnational corporations put money and skills into low income countries by setting up businesses there. That helps develop infrastructure such as roads and power, can improve access to water and electricity, brings improvements to transport such as ports and airports, and encourages other businesses to follow. Dyson is the example. In around 2003 Dyson moved its manufacturing from Malmesbury in Wiltshire to Malaysia. Malaysia gained inward investment; workers' earnings boosted the Malaysian economy, because the more they earn the more they spend and the more tax is paid; and other companies followed Dyson and opened factories nearby, which led to roads and other services being improved. The United Kingdom gained too: Dyson's profits rose, higher corporate taxes meant more money for public services such as health and education, and new opportunities opened up for scientists working on design and research at home.
-Industrial development is the second strategy. Growing industry brings high levels of employment; with more employment comes more income and more investment; and that starts the multiplier effect. It is the pattern of the BRICS nations. Malaysia again: since 1970 it has seen a dramatic growth in its wealth and in the quality of life of its people, with a thriving manufacturing sector whose leading products include Proton cars. As manufacturing grows the workforce becomes more skilled, the products become better, and sales income rises, which pays for the next round of growth.
+Investment is the first strategy. Transnational corporations put money and skills into low income countries by setting up businesses there. That helps develop infrastructure such as roads and power, can improve access to water and electricity, brings improvements to transport such as ports and airports, and encourages other businesses to follow. Dyson is the example. In around 2003 Dyson moved its manufacturing from Malmesbury in Wiltshire to Malaysia. Malaysia gained inward investment; workers' earnings boosted the Malaysian economy, because as earnings rise, so does spending, and so does the tax collected; and other companies followed Dyson and opened factories nearby, which led to roads and other services being improved. The United Kingdom gained too: Dyson's profits rose, higher corporate taxes meant more money for public services such as health and education, and new opportunities opened up for scientists working on design and research at home.
+Industrial development is the second strategy. Growing industry brings employment on a large scale; as more people work, incomes rise and investment follows; and that starts the multiplier effect. It is the pattern of the BRICS nations. Malaysia again: since 1970 it has seen a dramatic growth in its wealth and in the quality of life of its people, with a thriving manufacturing sector whose leading products include Proton cars. As manufacturing grows the workforce becomes more skilled, the products become better, and sales income rises, which pays for the next round of growth.
 Worked example — model it step by step, thinking aloud: A factory worker is paid £9 an hour in the United Kingdom and £3 an hour in Malaysia. How much less does a company pay for one worker over a 40-hour week? (1) Find the difference in the hourly rate first: £9 − £3 = £6 an hour. (2) Multiply the difference by the number of hours: £6 × 40. (3) Work it out: 6 × 40 = 240. (4) Answer with the unit of money: the company pays £240 less a week for that worker. Answer: £240 less a week.
 Tip: When you use the Dyson example, always give a benefit for Malaysia and a benefit for the United Kingdom. A one-sided answer loses the evaluation marks.</a:t>
             </a:r>
@@ -16112,7 +16112,7 @@
                 <a:ea typeface="Calibri" pitchFamily="34" charset="-122"/>
                 <a:cs typeface="Calibri" pitchFamily="34" charset="-120"/>
               </a:rPr>
-              <a:t>Industrial development is the second strategy. Growing industry brings high levels of employment; with more employment comes more income and more investment; and that starts the multiplier effect.</a:t>
+              <a:t>Industrial development is the second strategy. Growing industry brings employment on a large scale; as more people work, incomes rise and investment follows; and that starts the multiplier effect.</a:t>
             </a:r>
             <a:endParaRPr lang="en-US" sz="1800" dirty="0"/>
           </a:p>
